--- a/AI Fundamentals Course/Week 4/Week4_Slides_GenAI_Ethics_Strategy.pptx
+++ b/AI Fundamentals Course/Week 4/Week4_Slides_GenAI_Ethics_Strategy.pptx
@@ -4630,6 +4630,10 @@
           </a:solidFill>
           <a:ln/>
         </p:spPr>
+        <p:txBody>
+          <a:bodyPr/>
+          <a:p/>
+        </p:txBody>
       </p:sp>
       <p:sp>
         <p:nvSpPr>
@@ -4862,6 +4866,10 @@
           </a:solidFill>
           <a:ln/>
         </p:spPr>
+        <p:txBody>
+          <a:bodyPr/>
+          <a:p/>
+        </p:txBody>
       </p:sp>
       <p:sp>
         <p:nvSpPr>
@@ -5094,6 +5102,10 @@
           </a:solidFill>
           <a:ln/>
         </p:spPr>
+        <p:txBody>
+          <a:bodyPr/>
+          <a:p/>
+        </p:txBody>
       </p:sp>
       <p:sp>
         <p:nvSpPr>
@@ -5326,6 +5338,10 @@
           </a:solidFill>
           <a:ln/>
         </p:spPr>
+        <p:txBody>
+          <a:bodyPr/>
+          <a:p/>
+        </p:txBody>
       </p:sp>
       <p:sp>
         <p:nvSpPr>
@@ -5770,6 +5786,10 @@
           </a:solidFill>
           <a:ln/>
         </p:spPr>
+        <p:txBody>
+          <a:bodyPr/>
+          <a:p/>
+        </p:txBody>
       </p:sp>
       <p:sp>
         <p:nvSpPr>
@@ -6002,6 +6022,10 @@
           </a:solidFill>
           <a:ln/>
         </p:spPr>
+        <p:txBody>
+          <a:bodyPr/>
+          <a:p/>
+        </p:txBody>
       </p:sp>
       <p:sp>
         <p:nvSpPr>
@@ -6234,6 +6258,10 @@
           </a:solidFill>
           <a:ln/>
         </p:spPr>
+        <p:txBody>
+          <a:bodyPr/>
+          <a:p/>
+        </p:txBody>
       </p:sp>
       <p:sp>
         <p:nvSpPr>
@@ -6466,6 +6494,10 @@
           </a:solidFill>
           <a:ln/>
         </p:spPr>
+        <p:txBody>
+          <a:bodyPr/>
+          <a:p/>
+        </p:txBody>
       </p:sp>
       <p:sp>
         <p:nvSpPr>
@@ -6698,6 +6730,10 @@
           </a:solidFill>
           <a:ln/>
         </p:spPr>
+        <p:txBody>
+          <a:bodyPr/>
+          <a:p/>
+        </p:txBody>
       </p:sp>
       <p:sp>
         <p:nvSpPr>
@@ -7106,6 +7142,10 @@
           </a:solidFill>
           <a:ln/>
         </p:spPr>
+        <p:txBody>
+          <a:bodyPr/>
+          <a:p/>
+        </p:txBody>
       </p:sp>
       <p:sp>
         <p:nvSpPr>
@@ -7338,6 +7378,10 @@
           </a:solidFill>
           <a:ln/>
         </p:spPr>
+        <p:txBody>
+          <a:bodyPr/>
+          <a:p/>
+        </p:txBody>
       </p:sp>
       <p:sp>
         <p:nvSpPr>
@@ -7570,6 +7614,10 @@
           </a:solidFill>
           <a:ln/>
         </p:spPr>
+        <p:txBody>
+          <a:bodyPr/>
+          <a:p/>
+        </p:txBody>
       </p:sp>
       <p:sp>
         <p:nvSpPr>
@@ -7802,6 +7850,10 @@
           </a:solidFill>
           <a:ln/>
         </p:spPr>
+        <p:txBody>
+          <a:bodyPr/>
+          <a:p/>
+        </p:txBody>
       </p:sp>
       <p:sp>
         <p:nvSpPr>
@@ -8034,6 +8086,10 @@
           </a:solidFill>
           <a:ln/>
         </p:spPr>
+        <p:txBody>
+          <a:bodyPr/>
+          <a:p/>
+        </p:txBody>
       </p:sp>
       <p:sp>
         <p:nvSpPr>
@@ -8266,6 +8322,10 @@
           </a:solidFill>
           <a:ln/>
         </p:spPr>
+        <p:txBody>
+          <a:bodyPr/>
+          <a:p/>
+        </p:txBody>
       </p:sp>
       <p:sp>
         <p:nvSpPr>
@@ -8498,6 +8558,10 @@
           </a:solidFill>
           <a:ln/>
         </p:spPr>
+        <p:txBody>
+          <a:bodyPr/>
+          <a:p/>
+        </p:txBody>
       </p:sp>
       <p:sp>
         <p:nvSpPr>
@@ -8906,6 +8970,10 @@
           </a:solidFill>
           <a:ln/>
         </p:spPr>
+        <p:txBody>
+          <a:bodyPr/>
+          <a:p/>
+        </p:txBody>
       </p:sp>
       <p:sp>
         <p:nvSpPr>
@@ -9138,6 +9206,10 @@
           </a:solidFill>
           <a:ln/>
         </p:spPr>
+        <p:txBody>
+          <a:bodyPr/>
+          <a:p/>
+        </p:txBody>
       </p:sp>
       <p:sp>
         <p:nvSpPr>
@@ -9370,6 +9442,10 @@
           </a:solidFill>
           <a:ln/>
         </p:spPr>
+        <p:txBody>
+          <a:bodyPr/>
+          <a:p/>
+        </p:txBody>
       </p:sp>
       <p:sp>
         <p:nvSpPr>
@@ -9602,6 +9678,10 @@
           </a:solidFill>
           <a:ln/>
         </p:spPr>
+        <p:txBody>
+          <a:bodyPr/>
+          <a:p/>
+        </p:txBody>
       </p:sp>
       <p:sp>
         <p:nvSpPr>
@@ -9834,6 +9914,10 @@
           </a:solidFill>
           <a:ln/>
         </p:spPr>
+        <p:txBody>
+          <a:bodyPr/>
+          <a:p/>
+        </p:txBody>
       </p:sp>
       <p:sp>
         <p:nvSpPr>
@@ -10066,6 +10150,10 @@
           </a:solidFill>
           <a:ln/>
         </p:spPr>
+        <p:txBody>
+          <a:bodyPr/>
+          <a:p/>
+        </p:txBody>
       </p:sp>
       <p:sp>
         <p:nvSpPr>
@@ -10298,6 +10386,10 @@
           </a:solidFill>
           <a:ln/>
         </p:spPr>
+        <p:txBody>
+          <a:bodyPr/>
+          <a:p/>
+        </p:txBody>
       </p:sp>
       <p:sp>
         <p:nvSpPr>
@@ -10530,6 +10622,10 @@
           </a:solidFill>
           <a:ln/>
         </p:spPr>
+        <p:txBody>
+          <a:bodyPr/>
+          <a:p/>
+        </p:txBody>
       </p:sp>
       <p:sp>
         <p:nvSpPr>
@@ -10762,6 +10858,10 @@
           </a:solidFill>
           <a:ln/>
         </p:spPr>
+        <p:txBody>
+          <a:bodyPr/>
+          <a:p/>
+        </p:txBody>
       </p:sp>
       <p:sp>
         <p:nvSpPr>
@@ -11030,6 +11130,10 @@
           </a:solidFill>
           <a:ln/>
         </p:spPr>
+        <p:txBody>
+          <a:bodyPr/>
+          <a:p/>
+        </p:txBody>
       </p:sp>
       <p:sp>
         <p:nvSpPr>
@@ -11262,6 +11366,10 @@
           </a:solidFill>
           <a:ln/>
         </p:spPr>
+        <p:txBody>
+          <a:bodyPr/>
+          <a:p/>
+        </p:txBody>
       </p:sp>
       <p:sp>
         <p:nvSpPr>
@@ -11494,6 +11602,10 @@
           </a:solidFill>
           <a:ln/>
         </p:spPr>
+        <p:txBody>
+          <a:bodyPr/>
+          <a:p/>
+        </p:txBody>
       </p:sp>
       <p:sp>
         <p:nvSpPr>
@@ -11762,6 +11874,10 @@
           </a:solidFill>
           <a:ln/>
         </p:spPr>
+        <p:txBody>
+          <a:bodyPr/>
+          <a:p/>
+        </p:txBody>
       </p:sp>
       <p:sp>
         <p:nvSpPr>
@@ -11994,6 +12110,10 @@
           </a:solidFill>
           <a:ln/>
         </p:spPr>
+        <p:txBody>
+          <a:bodyPr/>
+          <a:p/>
+        </p:txBody>
       </p:sp>
       <p:sp>
         <p:nvSpPr>
@@ -12169,7 +12289,7 @@
                   <a:srgbClr val="333333"/>
                 </a:solidFill>
               </a:rPr>
-              <a:t>• Example: GPT-4: ~1.7T parameters, massive web data</a:t>
+              <a:t>• Example: GPT-4: parameter count undisclosed (outside estimates ~1T+), massive web data</a:t>
             </a:r>
             <a:endParaRPr lang="en-US" sz="1400" dirty="0"/>
           </a:p>
@@ -12226,6 +12346,10 @@
           </a:solidFill>
           <a:ln/>
         </p:spPr>
+        <p:txBody>
+          <a:bodyPr/>
+          <a:p/>
+        </p:txBody>
       </p:sp>
       <p:sp>
         <p:nvSpPr>
@@ -12458,6 +12582,10 @@
           </a:solidFill>
           <a:ln/>
         </p:spPr>
+        <p:txBody>
+          <a:bodyPr/>
+          <a:p/>
+        </p:txBody>
       </p:sp>
       <p:sp>
         <p:nvSpPr>
@@ -12690,6 +12818,10 @@
           </a:solidFill>
           <a:ln/>
         </p:spPr>
+        <p:txBody>
+          <a:bodyPr/>
+          <a:p/>
+        </p:txBody>
       </p:sp>
       <p:sp>
         <p:nvSpPr>
@@ -12922,6 +13054,10 @@
           </a:solidFill>
           <a:ln/>
         </p:spPr>
+        <p:txBody>
+          <a:bodyPr/>
+          <a:p/>
+        </p:txBody>
       </p:sp>
       <p:sp>
         <p:nvSpPr>
@@ -13154,6 +13290,10 @@
           </a:solidFill>
           <a:ln/>
         </p:spPr>
+        <p:txBody>
+          <a:bodyPr/>
+          <a:p/>
+        </p:txBody>
       </p:sp>
       <p:sp>
         <p:nvSpPr>
@@ -13350,6 +13490,10 @@
           </a:solidFill>
           <a:ln/>
         </p:spPr>
+        <p:txBody>
+          <a:bodyPr/>
+          <a:p/>
+        </p:txBody>
       </p:sp>
       <p:sp>
         <p:nvSpPr>
@@ -13582,6 +13726,10 @@
           </a:solidFill>
           <a:ln/>
         </p:spPr>
+        <p:txBody>
+          <a:bodyPr/>
+          <a:p/>
+        </p:txBody>
       </p:sp>
       <p:sp>
         <p:nvSpPr>

--- a/AI Fundamentals Course/Week 4/Week4_Slides_GenAI_Ethics_Strategy.pptx
+++ b/AI Fundamentals Course/Week 4/Week4_Slides_GenAI_Ethics_Strategy.pptx
@@ -12053,7 +12053,7 @@
                   <a:srgbClr val="333333"/>
                 </a:solidFill>
               </a:rPr>
-              <a:t>• Certifications: PCAP (Python Programmer)</a:t>
+              <a:t>• Certifications: PCAIP (Python Programmer)</a:t>
             </a:r>
             <a:endParaRPr lang="en-US" sz="1400" dirty="0"/>
           </a:p>
@@ -12653,7 +12653,7 @@
                   <a:srgbClr val="333333"/>
                 </a:solidFill>
               </a:rPr>
-              <a:t>• PCAP: Python syntax, data structures, OOP, file handling</a:t>
+              <a:t>• PCAIP: Python syntax, data structures, OOP, file handling</a:t>
             </a:r>
             <a:endParaRPr lang="en-US" sz="1400" dirty="0"/>
           </a:p>
